--- a/구두발표_보충_NPQ_PhiNO_PhiNPQ.pptx
+++ b/구두발표_보충_NPQ_PhiNO_PhiNPQ.pptx
@@ -566,7 +566,7 @@
           <a:lstStyle/>
           <a:p>
             <a:r>
-              <a:t>(약 25초) 비조절 에너지 소산 양자수율 ΦNO입니다. 이 값이 높으면 조절되지 않는 형태로 에너지가 소산되어 광계 손상 위험이 커진다는 신호입니다. 콩은 P2에서 건조·침수·복합구가 모두 대조구보다 높았고, 로메인은 처리 간 차이가 없었습니다.</a:t>
+              <a:t>(약 25초) 비조절 에너지 소산 양자수율 ΦNO입니다. 이 값이 높으면 조절되지 않는 형태로 에너지가 소산되어 광계 손상 위험이 커진다는 신호입니다. 콩은 P1에서 침수구가, P2에서 건조·침수·복합구가 모두 대조구보다 높았고, 로메인은 처리 간 차이가 없었습니다.</a:t>
             </a:r>
           </a:p>
         </p:txBody>
@@ -4484,7 +4484,7 @@
                             <a:srgbClr val="000000"/>
                           </a:solidFill>
                         </a:rPr>
-                        <a:t>0.212 a</a:t>
+                        <a:t>0.211 b</a:t>
                       </a:r>
                       <a:endParaRPr sz="800"/>
                     </a:p>
@@ -4761,7 +4761,7 @@
                             <a:srgbClr val="000000"/>
                           </a:solidFill>
                         </a:rPr>
-                        <a:t>0.237 a</a:t>
+                        <a:t>0.231 a</a:t>
                       </a:r>
                       <a:endParaRPr sz="800"/>
                     </a:p>
@@ -4983,7 +4983,7 @@
                             <a:srgbClr val="000000"/>
                           </a:solidFill>
                         </a:rPr>
-                        <a:t>0.239 a</a:t>
+                        <a:t>0.236 a</a:t>
                       </a:r>
                       <a:endParaRPr sz="800"/>
                     </a:p>
@@ -5211,7 +5211,7 @@
                             <a:srgbClr val="000000"/>
                           </a:solidFill>
                         </a:rPr>
-                        <a:t>0.237 a</a:t>
+                        <a:t>0.236 a</a:t>
                       </a:r>
                       <a:endParaRPr sz="800"/>
                     </a:p>
@@ -5303,7 +5303,7 @@
                             <a:srgbClr val="000000"/>
                           </a:solidFill>
                         </a:rPr>
-                        <a:t>0.224 a</a:t>
+                        <a:t>0.223 a</a:t>
                       </a:r>
                       <a:endParaRPr sz="800"/>
                     </a:p>
@@ -5475,7 +5475,7 @@
                   <a:srgbClr val="000000"/>
                 </a:solidFill>
               </a:rPr>
-              <a:t>콩:  P1은 처리 간 차이가 작았고, P2는 건조·침수·복합구가 대조구보다 높았음</a:t>
+              <a:t>콩:  P1은 침수구가 대조구보다 높았고, P2는 건조·침수·복합구가 대조구보다 높았음</a:t>
             </a:r>
           </a:p>
           <a:p>
@@ -5548,7 +5548,7 @@
                   <a:srgbClr val="E97132"/>
                 </a:solidFill>
               </a:rPr>
-              <a:t>콩은 P2에서 모든 처리구의 ΦNO가 대조구보다 높고, 로메인은 처리 간 차이 없음</a:t>
+              <a:t>콩은 P1 침수구와 P2 모든 처리구의 ΦNO가 대조구보다 높고, 로메인은 처리 간 차이 없음</a:t>
             </a:r>
           </a:p>
         </p:txBody>
@@ -5645,7 +5645,7 @@
                   <a:srgbClr val="595959"/>
                 </a:solidFill>
               </a:rPr>
-              <a:t> (Kramer et al., 2004; Oxborough &amp; Baker, 1997). Fo·Fm: 가장 가까운 날짜의 암적응 처리별 평균. 표·그림: PAR·기온 보정 평균 (Ali et al., 2025; Gao et al., 2024), Tukey 문자.</a:t>
+              <a:t> (Kramer et al., 2004; Oxborough &amp; Baker, 1997). Fo·Fm: 가장 가까운 날짜의 암적응 처리별 평균. 표·그림: PAR·기온 공변량 보정 평균, 혼합모형(처리 고정, 측정일 임의효과; Ali et al., 2025; Gao et al., 2024), Tukey 문자.</a:t>
             </a:r>
           </a:p>
         </p:txBody>
@@ -6416,7 +6416,7 @@
                             <a:srgbClr val="000000"/>
                           </a:solidFill>
                         </a:rPr>
-                        <a:t>0.389 a</a:t>
+                        <a:t>0.401 a</a:t>
                       </a:r>
                       <a:endParaRPr sz="800"/>
                     </a:p>
@@ -6462,7 +6462,7 @@
                             <a:srgbClr val="000000"/>
                           </a:solidFill>
                         </a:rPr>
-                        <a:t>0.497 ab</a:t>
+                        <a:t>0.490 ab</a:t>
                       </a:r>
                       <a:endParaRPr sz="800"/>
                     </a:p>
@@ -6554,7 +6554,7 @@
                             <a:srgbClr val="000000"/>
                           </a:solidFill>
                         </a:rPr>
-                        <a:t>0.631 a</a:t>
+                        <a:t>0.624 a</a:t>
                       </a:r>
                       <a:endParaRPr sz="800"/>
                     </a:p>
@@ -6693,7 +6693,7 @@
                             <a:srgbClr val="000000"/>
                           </a:solidFill>
                         </a:rPr>
-                        <a:t>0.631 a</a:t>
+                        <a:t>0.647 a</a:t>
                       </a:r>
                       <a:endParaRPr sz="800"/>
                     </a:p>
@@ -6779,7 +6779,7 @@
                             <a:srgbClr val="000000"/>
                           </a:solidFill>
                         </a:rPr>
-                        <a:t>0.619 a</a:t>
+                        <a:t>0.613 a</a:t>
                       </a:r>
                       <a:endParaRPr sz="800"/>
                     </a:p>
@@ -6872,7 +6872,7 @@
                             <a:srgbClr val="000000"/>
                           </a:solidFill>
                         </a:rPr>
-                        <a:t>0.444 a</a:t>
+                        <a:t>0.441 a</a:t>
                       </a:r>
                       <a:endParaRPr sz="800"/>
                     </a:p>
@@ -6915,7 +6915,7 @@
                             <a:srgbClr val="000000"/>
                           </a:solidFill>
                         </a:rPr>
-                        <a:t>0.403 b</a:t>
+                        <a:t>0.424 b</a:t>
                       </a:r>
                       <a:endParaRPr sz="800"/>
                     </a:p>
@@ -7001,7 +7001,7 @@
                             <a:srgbClr val="000000"/>
                           </a:solidFill>
                         </a:rPr>
-                        <a:t>0.610 a</a:t>
+                        <a:t>0.607 a</a:t>
                       </a:r>
                       <a:endParaRPr sz="800"/>
                     </a:p>
@@ -7143,7 +7143,7 @@
                             <a:srgbClr val="000000"/>
                           </a:solidFill>
                         </a:rPr>
-                        <a:t>0.526 ab</a:t>
+                        <a:t>0.541 ab</a:t>
                       </a:r>
                       <a:endParaRPr sz="800"/>
                     </a:p>
@@ -7577,7 +7577,7 @@
                   <a:srgbClr val="595959"/>
                 </a:solidFill>
               </a:rPr>
-              <a:t> (Kramer et al., 2004; Oxborough &amp; Baker, 1997). Fo·Fm: 가장 가까운 날짜의 암적응 처리별 평균. 표·그림: PAR·기온 보정 평균 (Ali et al., 2025; Gao et al., 2024), Tukey 문자.</a:t>
+              <a:t> (Kramer et al., 2004; Oxborough &amp; Baker, 1997). Fo·Fm: 가장 가까운 날짜의 암적응 처리별 평균. 표·그림: PAR·기온 공변량 보정 평균, 혼합모형(처리 고정, 측정일 임의효과; Ali et al., 2025; Gao et al., 2024), Tukey 문자.</a:t>
             </a:r>
           </a:p>
         </p:txBody>
@@ -8349,7 +8349,7 @@
                             <a:srgbClr val="000000"/>
                           </a:solidFill>
                         </a:rPr>
-                        <a:t>0.084 b</a:t>
+                        <a:t>0.087 b</a:t>
                       </a:r>
                       <a:endParaRPr sz="800"/>
                     </a:p>
@@ -8395,7 +8395,7 @@
                             <a:srgbClr val="000000"/>
                           </a:solidFill>
                         </a:rPr>
-                        <a:t>0.101 b</a:t>
+                        <a:t>0.100 b</a:t>
                       </a:r>
                       <a:endParaRPr sz="800"/>
                     </a:p>
@@ -8626,7 +8626,7 @@
                             <a:srgbClr val="000000"/>
                           </a:solidFill>
                         </a:rPr>
-                        <a:t>0.154 a</a:t>
+                        <a:t>0.157 a</a:t>
                       </a:r>
                       <a:endParaRPr sz="800"/>
                     </a:p>
@@ -8848,7 +8848,7 @@
                             <a:srgbClr val="000000"/>
                           </a:solidFill>
                         </a:rPr>
-                        <a:t>0.101 b</a:t>
+                        <a:t>0.104 b</a:t>
                       </a:r>
                       <a:endParaRPr sz="800"/>
                     </a:p>
@@ -8934,7 +8934,7 @@
                             <a:srgbClr val="000000"/>
                           </a:solidFill>
                         </a:rPr>
-                        <a:t>0.143 a</a:t>
+                        <a:t>0.142 a</a:t>
                       </a:r>
                       <a:endParaRPr sz="800"/>
                     </a:p>
@@ -9076,7 +9076,7 @@
                             <a:srgbClr val="000000"/>
                           </a:solidFill>
                         </a:rPr>
-                        <a:t>0.132 ab</a:t>
+                        <a:t>0.134 ab</a:t>
                       </a:r>
                       <a:endParaRPr sz="800"/>
                     </a:p>
@@ -9168,7 +9168,7 @@
                             <a:srgbClr val="000000"/>
                           </a:solidFill>
                         </a:rPr>
-                        <a:t>0.121 a</a:t>
+                        <a:t>0.120 a</a:t>
                       </a:r>
                       <a:endParaRPr sz="800"/>
                     </a:p>
@@ -9510,7 +9510,7 @@
                   <a:srgbClr val="595959"/>
                 </a:solidFill>
               </a:rPr>
-              <a:t> (Kramer et al., 2004; Oxborough &amp; Baker, 1997). Fo·Fm: 가장 가까운 날짜의 암적응 처리별 평균. 표·그림: PAR·기온 보정 평균 (Ali et al., 2025; Gao et al., 2024), Tukey 문자.</a:t>
+              <a:t> (Kramer et al., 2004; Oxborough &amp; Baker, 1997). Fo·Fm: 가장 가까운 날짜의 암적응 처리별 평균. 표·그림: PAR·기온 공변량 보정 평균, 혼합모형(처리 고정, 측정일 임의효과; Ali et al., 2025; Gao et al., 2024), Tukey 문자.</a:t>
             </a:r>
           </a:p>
         </p:txBody>
